--- a/reports/2026-02-demand-signal-deck.pptx
+++ b/reports/2026-02-demand-signal-deck.pptx
@@ -3372,7 +3372,7 @@
                 </a:solidFill>
                 <a:latin typeface="Calibri"/>
               </a:rPr>
-              <a:t>Soft Launch Intelligence Report  ·  February 2026</a:t>
+              <a:t>Soft Launch Intelligence Report  ·  February 16–18, 2026</a:t>
             </a:r>
           </a:p>
         </p:txBody>
